--- a/media/resources/files/BaardykAmaldarJenilOrtoOor_2WPOvmh.pptx
+++ b/media/resources/files/BaardykAmaldarJenilOrtoOor_2WPOvmh.pptx
@@ -1174,7 +1174,7 @@
                 <a:latin typeface="Arial" panose="020B0604020202020204" pitchFamily="34" charset="0"/>
                 <a:cs typeface="Arial" panose="020B0604020202020204" pitchFamily="34" charset="0"/>
               </a:rPr>
-              <a:t>Баардык амалдардын тартиби</a:t>
+              <a:t>Бардык амалдардын тартиби</a:t>
             </a:r>
             <a:endParaRPr lang="en-GB" sz="1800" u="sng" dirty="0">
               <a:solidFill>
@@ -10841,7 +10841,7 @@
                 <a:latin typeface="Helvetica" panose="020B0604020202020204" pitchFamily="34" charset="0"/>
                 <a:cs typeface="Helvetica" panose="020B0604020202020204" pitchFamily="34" charset="0"/>
               </a:rPr>
-              <a:t>Баардык учун рахмат айтабыз.</a:t>
+              <a:t>Бардык үчүн рахмат айтабыз.</a:t>
             </a:r>
           </a:p>
           <a:p>
